--- a/assets/img/posts/istqb/pic0-1-testing-overall.pptx
+++ b/assets/img/posts/istqb/pic0-1-testing-overall.pptx
@@ -11221,6 +11221,92 @@
           <a:lstStyle/>
           <a:p>
             <a:endParaRPr lang="ko-KR" altLang="en-US"/>
+          </a:p>
+        </p:txBody>
+      </p:sp>
+      <p:sp>
+        <p:nvSpPr>
+          <p:cNvPr id="123" name="테스트 유형 제목">
+            <a:extLst>
+              <a:ext uri="{FF2B5EF4-FFF2-40B4-BE49-F238E27FC236}">
+                <a16:creationId xmlns:a16="http://schemas.microsoft.com/office/drawing/2014/main" id="{E8DCF5D7-9F5A-15E8-B74E-3A091004F751}"/>
+              </a:ext>
+            </a:extLst>
+          </p:cNvPr>
+          <p:cNvSpPr>
+            <a:spLocks noGrp="1"/>
+          </p:cNvSpPr>
+          <p:nvPr/>
+        </p:nvSpPr>
+        <p:spPr>
+          <a:xfrm rot="-1458000">
+            <a:off x="4168553" y="7848532"/>
+            <a:ext cx="1952625" cy="476250"/>
+          </a:xfrm>
+          <a:prstGeom prst="rect">
+            <a:avLst/>
+          </a:prstGeom>
+          <a:noFill/>
+          <a:ln w="0">
+            <a:noFill/>
+            <a:prstDash val="solid"/>
+          </a:ln>
+        </p:spPr>
+        <p:txBody>
+          <a:bodyPr wrap="none" lIns="0" tIns="0" rIns="0" bIns="0" anchor="ctr"/>
+          <a:lstStyle/>
+          <a:p>
+            <a:pPr algn="ctr">
+              <a:defRPr sz="2250">
+                <a:solidFill>
+                  <a:srgbClr val="005300"/>
+                </a:solidFill>
+                <a:latin typeface="Noto Sans KR"/>
+                <a:ea typeface="Noto Sans KR"/>
+                <a:cs typeface="Noto Sans KR"/>
+              </a:defRPr>
+            </a:pPr>
+            <a:r>
+              <a:rPr lang="en-US" sz="2250">
+                <a:solidFill>
+                  <a:srgbClr val="005300"/>
+                </a:solidFill>
+                <a:latin typeface="Noto Sans KR"/>
+                <a:ea typeface="Noto Sans KR"/>
+                <a:cs typeface="Noto Sans KR"/>
+              </a:rPr>
+              <a:t>4</a:t>
+            </a:r>
+            <a:r>
+              <a:rPr sz="2250">
+                <a:solidFill>
+                  <a:srgbClr val="005300"/>
+                </a:solidFill>
+                <a:latin typeface="Noto Sans KR"/>
+                <a:ea typeface="Noto Sans KR"/>
+                <a:cs typeface="Noto Sans KR"/>
+              </a:rPr>
+              <a:t>장. </a:t>
+            </a:r>
+            <a:r>
+              <a:rPr lang="en-US" sz="2250">
+                <a:solidFill>
+                  <a:srgbClr val="005300"/>
+                </a:solidFill>
+                <a:latin typeface="Noto Sans KR"/>
+                <a:ea typeface="Noto Sans KR"/>
+                <a:cs typeface="Noto Sans KR"/>
+              </a:rPr>
+              <a:t>ISO/IEC 9126</a:t>
+            </a:r>
+            <a:endParaRPr sz="2250">
+              <a:solidFill>
+                <a:srgbClr val="005300"/>
+              </a:solidFill>
+              <a:latin typeface="Noto Sans KR"/>
+              <a:ea typeface="Noto Sans KR"/>
+              <a:cs typeface="Noto Sans KR"/>
+            </a:endParaRPr>
           </a:p>
         </p:txBody>
       </p:sp>
